--- a/卒業制作/完成/卒業制作.pptx
+++ b/卒業制作/完成/卒業制作.pptx
@@ -9,6 +9,7 @@
     <p:sldId id="257" r:id="rId3"/>
     <p:sldId id="258" r:id="rId4"/>
     <p:sldId id="259" r:id="rId5"/>
+    <p:sldId id="260" r:id="rId6"/>
   </p:sldIdLst>
   <p:sldSz cx="12192000" cy="6858000"/>
   <p:notesSz cx="6858000" cy="9144000"/>
@@ -107,6 +108,11 @@
       </a:defRPr>
     </a:lvl9pPr>
   </p:defaultTextStyle>
+  <p:extLst>
+    <p:ext uri="{EFAFB233-063F-42B5-8137-9DF3F51BA10A}">
+      <p15:sldGuideLst xmlns:p15="http://schemas.microsoft.com/office/powerpoint/2012/main"/>
+    </p:ext>
+  </p:extLst>
 </p:presentation>
 </file>
 
@@ -257,7 +263,7 @@
           <a:p>
             <a:fld id="{1BF13A27-6B67-45DC-8F94-32182CC35D8C}" type="datetimeFigureOut">
               <a:rPr kumimoji="1" lang="ja-JP" altLang="en-US" smtClean="0"/>
-              <a:t>2026/7/7</a:t>
+              <a:t>2026/7/9</a:t>
             </a:fld>
             <a:endParaRPr kumimoji="1" lang="ja-JP" altLang="en-US"/>
           </a:p>
@@ -487,7 +493,7 @@
           <a:p>
             <a:fld id="{1BF13A27-6B67-45DC-8F94-32182CC35D8C}" type="datetimeFigureOut">
               <a:rPr kumimoji="1" lang="ja-JP" altLang="en-US" smtClean="0"/>
-              <a:t>2026/7/7</a:t>
+              <a:t>2026/7/9</a:t>
             </a:fld>
             <a:endParaRPr kumimoji="1" lang="ja-JP" altLang="en-US"/>
           </a:p>
@@ -727,7 +733,7 @@
           <a:p>
             <a:fld id="{1BF13A27-6B67-45DC-8F94-32182CC35D8C}" type="datetimeFigureOut">
               <a:rPr kumimoji="1" lang="ja-JP" altLang="en-US" smtClean="0"/>
-              <a:t>2026/7/7</a:t>
+              <a:t>2026/7/9</a:t>
             </a:fld>
             <a:endParaRPr kumimoji="1" lang="ja-JP" altLang="en-US"/>
           </a:p>
@@ -957,7 +963,7 @@
           <a:p>
             <a:fld id="{1BF13A27-6B67-45DC-8F94-32182CC35D8C}" type="datetimeFigureOut">
               <a:rPr kumimoji="1" lang="ja-JP" altLang="en-US" smtClean="0"/>
-              <a:t>2026/7/7</a:t>
+              <a:t>2026/7/9</a:t>
             </a:fld>
             <a:endParaRPr kumimoji="1" lang="ja-JP" altLang="en-US"/>
           </a:p>
@@ -1232,7 +1238,7 @@
           <a:p>
             <a:fld id="{1BF13A27-6B67-45DC-8F94-32182CC35D8C}" type="datetimeFigureOut">
               <a:rPr kumimoji="1" lang="ja-JP" altLang="en-US" smtClean="0"/>
-              <a:t>2026/7/7</a:t>
+              <a:t>2026/7/9</a:t>
             </a:fld>
             <a:endParaRPr kumimoji="1" lang="ja-JP" altLang="en-US"/>
           </a:p>
@@ -1561,7 +1567,7 @@
           <a:p>
             <a:fld id="{1BF13A27-6B67-45DC-8F94-32182CC35D8C}" type="datetimeFigureOut">
               <a:rPr kumimoji="1" lang="ja-JP" altLang="en-US" smtClean="0"/>
-              <a:t>2026/7/7</a:t>
+              <a:t>2026/7/9</a:t>
             </a:fld>
             <a:endParaRPr kumimoji="1" lang="ja-JP" altLang="en-US"/>
           </a:p>
@@ -2037,7 +2043,7 @@
           <a:p>
             <a:fld id="{1BF13A27-6B67-45DC-8F94-32182CC35D8C}" type="datetimeFigureOut">
               <a:rPr kumimoji="1" lang="ja-JP" altLang="en-US" smtClean="0"/>
-              <a:t>2026/7/7</a:t>
+              <a:t>2026/7/9</a:t>
             </a:fld>
             <a:endParaRPr kumimoji="1" lang="ja-JP" altLang="en-US"/>
           </a:p>
@@ -2178,7 +2184,7 @@
           <a:p>
             <a:fld id="{1BF13A27-6B67-45DC-8F94-32182CC35D8C}" type="datetimeFigureOut">
               <a:rPr kumimoji="1" lang="ja-JP" altLang="en-US" smtClean="0"/>
-              <a:t>2026/7/7</a:t>
+              <a:t>2026/7/9</a:t>
             </a:fld>
             <a:endParaRPr kumimoji="1" lang="ja-JP" altLang="en-US"/>
           </a:p>
@@ -2291,7 +2297,7 @@
           <a:p>
             <a:fld id="{1BF13A27-6B67-45DC-8F94-32182CC35D8C}" type="datetimeFigureOut">
               <a:rPr kumimoji="1" lang="ja-JP" altLang="en-US" smtClean="0"/>
-              <a:t>2026/7/7</a:t>
+              <a:t>2026/7/9</a:t>
             </a:fld>
             <a:endParaRPr kumimoji="1" lang="ja-JP" altLang="en-US"/>
           </a:p>
@@ -2634,7 +2640,7 @@
           <a:p>
             <a:fld id="{1BF13A27-6B67-45DC-8F94-32182CC35D8C}" type="datetimeFigureOut">
               <a:rPr kumimoji="1" lang="ja-JP" altLang="en-US" smtClean="0"/>
-              <a:t>2026/7/7</a:t>
+              <a:t>2026/7/9</a:t>
             </a:fld>
             <a:endParaRPr kumimoji="1" lang="ja-JP" altLang="en-US"/>
           </a:p>
@@ -2922,7 +2928,7 @@
           <a:p>
             <a:fld id="{1BF13A27-6B67-45DC-8F94-32182CC35D8C}" type="datetimeFigureOut">
               <a:rPr kumimoji="1" lang="ja-JP" altLang="en-US" smtClean="0"/>
-              <a:t>2026/7/7</a:t>
+              <a:t>2026/7/9</a:t>
             </a:fld>
             <a:endParaRPr kumimoji="1" lang="ja-JP" altLang="en-US"/>
           </a:p>
@@ -3195,7 +3201,7 @@
           <a:p>
             <a:fld id="{1BF13A27-6B67-45DC-8F94-32182CC35D8C}" type="datetimeFigureOut">
               <a:rPr kumimoji="1" lang="ja-JP" altLang="en-US" smtClean="0"/>
-              <a:t>2026/7/7</a:t>
+              <a:t>2026/7/9</a:t>
             </a:fld>
             <a:endParaRPr kumimoji="1" lang="ja-JP" altLang="en-US"/>
           </a:p>
@@ -3680,10 +3686,10 @@
       </p:grpSpPr>
       <p:pic>
         <p:nvPicPr>
-          <p:cNvPr id="5" name="図 4">
-            <a:extLst>
-              <a:ext uri="{FF2B5EF4-FFF2-40B4-BE49-F238E27FC236}">
-                <a16:creationId xmlns:a16="http://schemas.microsoft.com/office/drawing/2014/main" id="{A53F9A70-6DF4-1364-D34E-5D4E8AB5E9B9}"/>
+          <p:cNvPr id="3" name="図 2">
+            <a:extLst>
+              <a:ext uri="{FF2B5EF4-FFF2-40B4-BE49-F238E27FC236}">
+                <a16:creationId xmlns:a16="http://schemas.microsoft.com/office/drawing/2014/main" id="{C7601235-6208-442D-88A7-71719D714180}"/>
               </a:ext>
             </a:extLst>
           </p:cNvPr>
@@ -3812,10 +3818,76 @@
       </p:grpSpPr>
       <p:pic>
         <p:nvPicPr>
-          <p:cNvPr id="3" name="図 2">
-            <a:extLst>
-              <a:ext uri="{FF2B5EF4-FFF2-40B4-BE49-F238E27FC236}">
-                <a16:creationId xmlns:a16="http://schemas.microsoft.com/office/drawing/2014/main" id="{908D299A-982E-71E7-DA99-90D38DB6D56F}"/>
+          <p:cNvPr id="4" name="図 3">
+            <a:extLst>
+              <a:ext uri="{FF2B5EF4-FFF2-40B4-BE49-F238E27FC236}">
+                <a16:creationId xmlns:a16="http://schemas.microsoft.com/office/drawing/2014/main" id="{57D73E3F-9727-4677-9715-C03AA38D6346}"/>
+              </a:ext>
+            </a:extLst>
+          </p:cNvPr>
+          <p:cNvPicPr>
+            <a:picLocks noChangeAspect="1"/>
+          </p:cNvPicPr>
+          <p:nvPr/>
+        </p:nvPicPr>
+        <p:blipFill>
+          <a:blip r:embed="rId2">
+            <a:extLst>
+              <a:ext uri="{28A0092B-C50C-407E-A947-70E740481C1C}">
+                <a14:useLocalDpi xmlns:a14="http://schemas.microsoft.com/office/drawing/2010/main" val="0"/>
+              </a:ext>
+            </a:extLst>
+          </a:blip>
+          <a:stretch>
+            <a:fillRect/>
+          </a:stretch>
+        </p:blipFill>
+        <p:spPr>
+          <a:xfrm>
+            <a:off x="0" y="1"/>
+            <a:ext cx="12191999" cy="6857998"/>
+          </a:xfrm>
+          <a:prstGeom prst="rect">
+            <a:avLst/>
+          </a:prstGeom>
+        </p:spPr>
+      </p:pic>
+    </p:spTree>
+    <p:extLst>
+      <p:ext uri="{BB962C8B-B14F-4D97-AF65-F5344CB8AC3E}">
+        <p14:creationId xmlns:p14="http://schemas.microsoft.com/office/powerpoint/2010/main" val="2442993834"/>
+      </p:ext>
+    </p:extLst>
+  </p:cSld>
+  <p:clrMapOvr>
+    <a:masterClrMapping/>
+  </p:clrMapOvr>
+</p:sld>
+</file>
+
+<file path=ppt/slides/slide5.xml><?xml version="1.0" encoding="utf-8"?>
+<p:sld xmlns:a="http://schemas.openxmlformats.org/drawingml/2006/main" xmlns:r="http://schemas.openxmlformats.org/officeDocument/2006/relationships" xmlns:p="http://schemas.openxmlformats.org/presentationml/2006/main">
+  <p:cSld>
+    <p:spTree>
+      <p:nvGrpSpPr>
+        <p:cNvPr id="1" name=""/>
+        <p:cNvGrpSpPr/>
+        <p:nvPr/>
+      </p:nvGrpSpPr>
+      <p:grpSpPr>
+        <a:xfrm>
+          <a:off x="0" y="0"/>
+          <a:ext cx="0" cy="0"/>
+          <a:chOff x="0" y="0"/>
+          <a:chExt cx="0" cy="0"/>
+        </a:xfrm>
+      </p:grpSpPr>
+      <p:pic>
+        <p:nvPicPr>
+          <p:cNvPr id="4" name="図 3">
+            <a:extLst>
+              <a:ext uri="{FF2B5EF4-FFF2-40B4-BE49-F238E27FC236}">
+                <a16:creationId xmlns:a16="http://schemas.microsoft.com/office/drawing/2014/main" id="{F7AFFE79-23B5-4F88-9A82-67542259F6E1}"/>
               </a:ext>
             </a:extLst>
           </p:cNvPr>
@@ -3849,7 +3921,7 @@
     </p:spTree>
     <p:extLst>
       <p:ext uri="{BB962C8B-B14F-4D97-AF65-F5344CB8AC3E}">
-        <p14:creationId xmlns:p14="http://schemas.microsoft.com/office/powerpoint/2010/main" val="2442993834"/>
+        <p14:creationId xmlns:p14="http://schemas.microsoft.com/office/powerpoint/2010/main" val="1754509298"/>
       </p:ext>
     </p:extLst>
   </p:cSld>

--- a/卒業制作/完成/卒業制作.pptx
+++ b/卒業制作/完成/卒業制作.pptx
@@ -263,7 +263,7 @@
           <a:p>
             <a:fld id="{1BF13A27-6B67-45DC-8F94-32182CC35D8C}" type="datetimeFigureOut">
               <a:rPr kumimoji="1" lang="ja-JP" altLang="en-US" smtClean="0"/>
-              <a:t>2026/7/9</a:t>
+              <a:t>2026/7/10</a:t>
             </a:fld>
             <a:endParaRPr kumimoji="1" lang="ja-JP" altLang="en-US"/>
           </a:p>
@@ -493,7 +493,7 @@
           <a:p>
             <a:fld id="{1BF13A27-6B67-45DC-8F94-32182CC35D8C}" type="datetimeFigureOut">
               <a:rPr kumimoji="1" lang="ja-JP" altLang="en-US" smtClean="0"/>
-              <a:t>2026/7/9</a:t>
+              <a:t>2026/7/10</a:t>
             </a:fld>
             <a:endParaRPr kumimoji="1" lang="ja-JP" altLang="en-US"/>
           </a:p>
@@ -733,7 +733,7 @@
           <a:p>
             <a:fld id="{1BF13A27-6B67-45DC-8F94-32182CC35D8C}" type="datetimeFigureOut">
               <a:rPr kumimoji="1" lang="ja-JP" altLang="en-US" smtClean="0"/>
-              <a:t>2026/7/9</a:t>
+              <a:t>2026/7/10</a:t>
             </a:fld>
             <a:endParaRPr kumimoji="1" lang="ja-JP" altLang="en-US"/>
           </a:p>
@@ -963,7 +963,7 @@
           <a:p>
             <a:fld id="{1BF13A27-6B67-45DC-8F94-32182CC35D8C}" type="datetimeFigureOut">
               <a:rPr kumimoji="1" lang="ja-JP" altLang="en-US" smtClean="0"/>
-              <a:t>2026/7/9</a:t>
+              <a:t>2026/7/10</a:t>
             </a:fld>
             <a:endParaRPr kumimoji="1" lang="ja-JP" altLang="en-US"/>
           </a:p>
@@ -1238,7 +1238,7 @@
           <a:p>
             <a:fld id="{1BF13A27-6B67-45DC-8F94-32182CC35D8C}" type="datetimeFigureOut">
               <a:rPr kumimoji="1" lang="ja-JP" altLang="en-US" smtClean="0"/>
-              <a:t>2026/7/9</a:t>
+              <a:t>2026/7/10</a:t>
             </a:fld>
             <a:endParaRPr kumimoji="1" lang="ja-JP" altLang="en-US"/>
           </a:p>
@@ -1567,7 +1567,7 @@
           <a:p>
             <a:fld id="{1BF13A27-6B67-45DC-8F94-32182CC35D8C}" type="datetimeFigureOut">
               <a:rPr kumimoji="1" lang="ja-JP" altLang="en-US" smtClean="0"/>
-              <a:t>2026/7/9</a:t>
+              <a:t>2026/7/10</a:t>
             </a:fld>
             <a:endParaRPr kumimoji="1" lang="ja-JP" altLang="en-US"/>
           </a:p>
@@ -2043,7 +2043,7 @@
           <a:p>
             <a:fld id="{1BF13A27-6B67-45DC-8F94-32182CC35D8C}" type="datetimeFigureOut">
               <a:rPr kumimoji="1" lang="ja-JP" altLang="en-US" smtClean="0"/>
-              <a:t>2026/7/9</a:t>
+              <a:t>2026/7/10</a:t>
             </a:fld>
             <a:endParaRPr kumimoji="1" lang="ja-JP" altLang="en-US"/>
           </a:p>
@@ -2184,7 +2184,7 @@
           <a:p>
             <a:fld id="{1BF13A27-6B67-45DC-8F94-32182CC35D8C}" type="datetimeFigureOut">
               <a:rPr kumimoji="1" lang="ja-JP" altLang="en-US" smtClean="0"/>
-              <a:t>2026/7/9</a:t>
+              <a:t>2026/7/10</a:t>
             </a:fld>
             <a:endParaRPr kumimoji="1" lang="ja-JP" altLang="en-US"/>
           </a:p>
@@ -2297,7 +2297,7 @@
           <a:p>
             <a:fld id="{1BF13A27-6B67-45DC-8F94-32182CC35D8C}" type="datetimeFigureOut">
               <a:rPr kumimoji="1" lang="ja-JP" altLang="en-US" smtClean="0"/>
-              <a:t>2026/7/9</a:t>
+              <a:t>2026/7/10</a:t>
             </a:fld>
             <a:endParaRPr kumimoji="1" lang="ja-JP" altLang="en-US"/>
           </a:p>
@@ -2640,7 +2640,7 @@
           <a:p>
             <a:fld id="{1BF13A27-6B67-45DC-8F94-32182CC35D8C}" type="datetimeFigureOut">
               <a:rPr kumimoji="1" lang="ja-JP" altLang="en-US" smtClean="0"/>
-              <a:t>2026/7/9</a:t>
+              <a:t>2026/7/10</a:t>
             </a:fld>
             <a:endParaRPr kumimoji="1" lang="ja-JP" altLang="en-US"/>
           </a:p>
@@ -2928,7 +2928,7 @@
           <a:p>
             <a:fld id="{1BF13A27-6B67-45DC-8F94-32182CC35D8C}" type="datetimeFigureOut">
               <a:rPr kumimoji="1" lang="ja-JP" altLang="en-US" smtClean="0"/>
-              <a:t>2026/7/9</a:t>
+              <a:t>2026/7/10</a:t>
             </a:fld>
             <a:endParaRPr kumimoji="1" lang="ja-JP" altLang="en-US"/>
           </a:p>
@@ -3201,7 +3201,7 @@
           <a:p>
             <a:fld id="{1BF13A27-6B67-45DC-8F94-32182CC35D8C}" type="datetimeFigureOut">
               <a:rPr kumimoji="1" lang="ja-JP" altLang="en-US" smtClean="0"/>
-              <a:t>2026/7/9</a:t>
+              <a:t>2026/7/10</a:t>
             </a:fld>
             <a:endParaRPr kumimoji="1" lang="ja-JP" altLang="en-US"/>
           </a:p>
@@ -3752,10 +3752,10 @@
       </p:grpSpPr>
       <p:pic>
         <p:nvPicPr>
-          <p:cNvPr id="3" name="図 2">
-            <a:extLst>
-              <a:ext uri="{FF2B5EF4-FFF2-40B4-BE49-F238E27FC236}">
-                <a16:creationId xmlns:a16="http://schemas.microsoft.com/office/drawing/2014/main" id="{CD284685-9CDD-7F1A-5D25-A22EA5777218}"/>
+          <p:cNvPr id="6" name="図 5">
+            <a:extLst>
+              <a:ext uri="{FF2B5EF4-FFF2-40B4-BE49-F238E27FC236}">
+                <a16:creationId xmlns:a16="http://schemas.microsoft.com/office/drawing/2014/main" id="{2A53F4AE-6148-44D7-B91D-0EBE9A0E4A9D}"/>
               </a:ext>
             </a:extLst>
           </p:cNvPr>
